--- a/course/slides/AF-TRACKF-M10/AF-TRACKF-M10-v1.pptx
+++ b/course/slides/AF-TRACKF-M10/AF-TRACKF-M10-v1.pptx
@@ -5922,7 +5922,7 @@
         </p:blipFill>
         <p:spPr>
           <a:xfrm>
-            <a:off x="609600" y="3185160"/>
+            <a:off x="609600" y="3020060"/>
             <a:ext cx="1016000" cy="1016000"/>
           </a:xfrm>
           <a:prstGeom prst="rect">
@@ -5938,7 +5938,7 @@
         </p:nvSpPr>
         <p:spPr>
           <a:xfrm>
-            <a:off x="2070100" y="3147060"/>
+            <a:off x="2070100" y="2981960"/>
             <a:ext cx="9563100" cy="619760"/>
           </a:xfrm>
           <a:prstGeom prst="rect">
@@ -5977,8 +5977,8 @@
         </p:nvSpPr>
         <p:spPr>
           <a:xfrm>
-            <a:off x="2070100" y="3931920"/>
-            <a:ext cx="9563100" cy="355600"/>
+            <a:off x="2070100" y="3766820"/>
+            <a:ext cx="9563100" cy="685800"/>
           </a:xfrm>
           <a:prstGeom prst="rect">
             <a:avLst/>
@@ -6003,7 +6003,23 @@
                 </a:solidFill>
                 <a:latin typeface="Lexend"/>
               </a:rPr>
-              <a:t>Your turn.</a:t>
+              <a:t>Take your own idea and write a short name, then the three-part brief: what it</a:t>
+            </a:r>
+          </a:p>
+          <a:p>
+            <a:pPr algn="l">
+              <a:lnSpc>
+                <a:spcPts val="2600"/>
+              </a:lnSpc>
+            </a:pPr>
+            <a:r>
+              <a:rPr sz="2000" b="0">
+                <a:solidFill>
+                  <a:srgbClr val="756E65"/>
+                </a:solidFill>
+                <a:latin typeface="Lexend"/>
+              </a:rPr>
+              <a:t>is, who pays, and the pain it removes.</a:t>
             </a:r>
           </a:p>
         </p:txBody>
@@ -9255,7 +9271,7 @@
                 </a:solidFill>
                 <a:latin typeface="Lexend"/>
               </a:rPr>
-              <a:t>First, the future.</a:t>
+              <a:t>Everything in the next two parts is Vision 2029, illustrative.</a:t>
             </a:r>
           </a:p>
         </p:txBody>
@@ -9810,7 +9826,7 @@
                 </a:solidFill>
                 <a:latin typeface="Lexend"/>
               </a:rPr>
-              <a:t>Still Vision 2029, illustrative.</a:t>
+              <a:t>The leak probe reports All Clear across 18,240 tables.</a:t>
             </a:r>
           </a:p>
         </p:txBody>
@@ -10855,7 +10871,7 @@
         </p:blipFill>
         <p:spPr>
           <a:xfrm>
-            <a:off x="609600" y="3185160"/>
+            <a:off x="609600" y="3020060"/>
             <a:ext cx="1016000" cy="1016000"/>
           </a:xfrm>
           <a:prstGeom prst="rect">
@@ -10871,7 +10887,7 @@
         </p:nvSpPr>
         <p:spPr>
           <a:xfrm>
-            <a:off x="2070100" y="3147060"/>
+            <a:off x="2070100" y="2981960"/>
             <a:ext cx="9563100" cy="619760"/>
           </a:xfrm>
           <a:prstGeom prst="rect">
@@ -10910,8 +10926,8 @@
         </p:nvSpPr>
         <p:spPr>
           <a:xfrm>
-            <a:off x="2070100" y="3931920"/>
-            <a:ext cx="9563100" cy="355600"/>
+            <a:off x="2070100" y="3766820"/>
+            <a:ext cx="9563100" cy="685800"/>
           </a:xfrm>
           <a:prstGeom prst="rect">
             <a:avLst/>
@@ -10936,7 +10952,23 @@
                 </a:solidFill>
                 <a:latin typeface="Lexend"/>
               </a:rPr>
-              <a:t>Now the next steps.</a:t>
+              <a:t>A value ladder is a set of steps, where each step offers a little more help for</a:t>
+            </a:r>
+          </a:p>
+          <a:p>
+            <a:pPr algn="l">
+              <a:lnSpc>
+                <a:spcPts val="2600"/>
+              </a:lnSpc>
+            </a:pPr>
+            <a:r>
+              <a:rPr sz="2000" b="0">
+                <a:solidFill>
+                  <a:srgbClr val="756E65"/>
+                </a:solidFill>
+                <a:latin typeface="Lexend"/>
+              </a:rPr>
+              <a:t>the people who want it, and nobody has to climb higher...</a:t>
             </a:r>
           </a:p>
         </p:txBody>
@@ -11410,7 +11442,7 @@
         </p:blipFill>
         <p:spPr>
           <a:xfrm>
-            <a:off x="609600" y="3185160"/>
+            <a:off x="609600" y="3020060"/>
             <a:ext cx="1016000" cy="1016000"/>
           </a:xfrm>
           <a:prstGeom prst="rect">
@@ -11426,7 +11458,7 @@
         </p:nvSpPr>
         <p:spPr>
           <a:xfrm>
-            <a:off x="2070100" y="3147060"/>
+            <a:off x="2070100" y="2981960"/>
             <a:ext cx="9563100" cy="619760"/>
           </a:xfrm>
           <a:prstGeom prst="rect">
@@ -11465,8 +11497,8 @@
         </p:nvSpPr>
         <p:spPr>
           <a:xfrm>
-            <a:off x="2070100" y="3931920"/>
-            <a:ext cx="9563100" cy="355600"/>
+            <a:off x="2070100" y="3766820"/>
+            <a:ext cx="9563100" cy="685800"/>
           </a:xfrm>
           <a:prstGeom prst="rect">
             <a:avLst/>
@@ -11491,7 +11523,23 @@
                 </a:solidFill>
                 <a:latin typeface="Lexend"/>
               </a:rPr>
-              <a:t>Step one is where you are now.</a:t>
+              <a:t>The course explains how an idea becomes a live app: stages, rooms, gates,</a:t>
+            </a:r>
+          </a:p>
+          <a:p>
+            <a:pPr algn="l">
+              <a:lnSpc>
+                <a:spcPts val="2600"/>
+              </a:lnSpc>
+            </a:pPr>
+            <a:r>
+              <a:rPr sz="2000" b="0">
+                <a:solidFill>
+                  <a:srgbClr val="756E65"/>
+                </a:solidFill>
+                <a:latin typeface="Lexend"/>
+              </a:rPr>
+              <a:t>codes, bricks, walls and tests, in plain words.</a:t>
             </a:r>
           </a:p>
         </p:txBody>
@@ -16511,7 +16559,7 @@
                 </a:solidFill>
                 <a:latin typeface="Lexend"/>
               </a:rPr>
-              <a:t>Now the 20 codes, in four groups.</a:t>
+              <a:t>Each code is a word plus a number.</a:t>
             </a:r>
           </a:p>
         </p:txBody>
@@ -16876,7 +16924,7 @@
         </p:blipFill>
         <p:spPr>
           <a:xfrm>
-            <a:off x="609600" y="3185160"/>
+            <a:off x="609600" y="3020060"/>
             <a:ext cx="1016000" cy="1016000"/>
           </a:xfrm>
           <a:prstGeom prst="rect">
@@ -16892,7 +16940,7 @@
         </p:nvSpPr>
         <p:spPr>
           <a:xfrm>
-            <a:off x="2070100" y="3147060"/>
+            <a:off x="2070100" y="2981960"/>
             <a:ext cx="9563100" cy="619760"/>
           </a:xfrm>
           <a:prstGeom prst="rect">
@@ -16931,8 +16979,8 @@
         </p:nvSpPr>
         <p:spPr>
           <a:xfrm>
-            <a:off x="2070100" y="3931920"/>
-            <a:ext cx="9563100" cy="355600"/>
+            <a:off x="2070100" y="3766820"/>
+            <a:ext cx="9563100" cy="685800"/>
           </a:xfrm>
           <a:prstGeom prst="rect">
             <a:avLst/>
@@ -16957,7 +17005,23 @@
                 </a:solidFill>
                 <a:latin typeface="Lexend"/>
               </a:rPr>
-              <a:t>Group 2 is Who Signs In.</a:t>
+              <a:t>ROLE (0-2) is 2, roles with different access, so a breeder and their helper</a:t>
+            </a:r>
+          </a:p>
+          <a:p>
+            <a:pPr algn="l">
+              <a:lnSpc>
+                <a:spcPts val="2600"/>
+              </a:lnSpc>
+            </a:pPr>
+            <a:r>
+              <a:rPr sz="2000" b="0">
+                <a:solidFill>
+                  <a:srgbClr val="756E65"/>
+                </a:solidFill>
+                <a:latin typeface="Lexend"/>
+              </a:rPr>
+              <a:t>need not see the same things.</a:t>
             </a:r>
           </a:p>
         </p:txBody>
@@ -17403,7 +17467,7 @@
                 </a:solidFill>
                 <a:latin typeface="Lexend"/>
               </a:rPr>
-              <a:t>Group 3 is Customers.</a:t>
+              <a:t>CUST (0-5) is 3, customers write, so puppy buyers can add to their records.</a:t>
             </a:r>
           </a:p>
         </p:txBody>
@@ -17768,7 +17832,7 @@
         </p:blipFill>
         <p:spPr>
           <a:xfrm>
-            <a:off x="609600" y="3185160"/>
+            <a:off x="609600" y="3020060"/>
             <a:ext cx="1016000" cy="1016000"/>
           </a:xfrm>
           <a:prstGeom prst="rect">
@@ -17784,7 +17848,7 @@
         </p:nvSpPr>
         <p:spPr>
           <a:xfrm>
-            <a:off x="2070100" y="3147060"/>
+            <a:off x="2070100" y="2981960"/>
             <a:ext cx="9563100" cy="619760"/>
           </a:xfrm>
           <a:prstGeom prst="rect">
@@ -17823,8 +17887,8 @@
         </p:nvSpPr>
         <p:spPr>
           <a:xfrm>
-            <a:off x="2070100" y="3931920"/>
-            <a:ext cx="9563100" cy="355600"/>
+            <a:off x="2070100" y="3766820"/>
+            <a:ext cx="9563100" cy="685800"/>
           </a:xfrm>
           <a:prstGeom prst="rect">
             <a:avLst/>
@@ -17849,7 +17913,23 @@
                 </a:solidFill>
                 <a:latin typeface="Lexend"/>
               </a:rPr>
-              <a:t>Next come the three kill questions.</a:t>
+              <a:t>In our worked example all three are answered no, partly because licences</a:t>
+            </a:r>
+          </a:p>
+          <a:p>
+            <a:pPr algn="l">
+              <a:lnSpc>
+                <a:spcPts val="2600"/>
+              </a:lnSpc>
+            </a:pPr>
+            <a:r>
+              <a:rPr sz="2000" b="0">
+                <a:solidFill>
+                  <a:srgbClr val="756E65"/>
+                </a:solidFill>
+                <a:latin typeface="Lexend"/>
+              </a:rPr>
+              <a:t>renew, which brings breeders back.</a:t>
             </a:r>
           </a:p>
         </p:txBody>
